--- a/index/designs/y7-l12/l3-up-down-pairs-pinyin/l3-up-down-pairs-pinyin.pptx
+++ b/index/designs/y7-l12/l3-up-down-pairs-pinyin/l3-up-down-pairs-pinyin.pptx
@@ -2171,15 +2171,6 @@
               </a:rPr>
               <a:t>上课</a:t>
             </a:r>
-            <a:pPr algn="ctr" indent="0" marL="0">
-              <a:lnSpc>
-                <a:spcPts val="7920"/>
-              </a:lnSpc>
-              <a:spcAft>
-                <a:spcPts val="400"/>
-              </a:spcAft>
-              <a:buNone/>
-            </a:pPr>
             <a:r>
               <a:rPr lang="en-US" sz="7200" b="1" dirty="0">
                 <a:solidFill>
@@ -2191,15 +2182,6 @@
               </a:rPr>
               <a:t>·</a:t>
             </a:r>
-            <a:pPr algn="ctr" indent="0" marL="0">
-              <a:lnSpc>
-                <a:spcPts val="7920"/>
-              </a:lnSpc>
-              <a:spcAft>
-                <a:spcPts val="400"/>
-              </a:spcAft>
-              <a:buNone/>
-            </a:pPr>
             <a:r>
               <a:rPr lang="en-US" sz="7200" dirty="0">
                 <a:solidFill>
@@ -3262,9 +3244,6 @@
               </a:rPr>
               <a:t>上课 </a:t>
             </a:r>
-            <a:pPr algn="l" indent="0" marL="0">
-              <a:buNone/>
-            </a:pPr>
             <a:r>
               <a:rPr lang="en-US" sz="1400" b="1" dirty="0">
                 <a:solidFill>
@@ -3276,9 +3255,6 @@
               </a:rPr>
               <a:t>↔</a:t>
             </a:r>
-            <a:pPr algn="l" indent="0" marL="0">
-              <a:buNone/>
-            </a:pPr>
             <a:r>
               <a:rPr lang="en-US" sz="1400" dirty="0">
                 <a:solidFill>
@@ -3363,9 +3339,6 @@
               </a:rPr>
               <a:t>上学 </a:t>
             </a:r>
-            <a:pPr algn="l" indent="0" marL="0">
-              <a:buNone/>
-            </a:pPr>
             <a:r>
               <a:rPr lang="en-US" sz="1400" b="1" dirty="0">
                 <a:solidFill>
@@ -3377,9 +3350,6 @@
               </a:rPr>
               <a:t>↔</a:t>
             </a:r>
-            <a:pPr algn="l" indent="0" marL="0">
-              <a:buNone/>
-            </a:pPr>
             <a:r>
               <a:rPr lang="en-US" sz="1400" dirty="0">
                 <a:solidFill>
@@ -3464,9 +3434,6 @@
               </a:rPr>
               <a:t>上班 </a:t>
             </a:r>
-            <a:pPr algn="l" indent="0" marL="0">
-              <a:buNone/>
-            </a:pPr>
             <a:r>
               <a:rPr lang="en-US" sz="1400" b="1" dirty="0">
                 <a:solidFill>
@@ -3478,9 +3445,6 @@
               </a:rPr>
               <a:t>↔</a:t>
             </a:r>
-            <a:pPr algn="l" indent="0" marL="0">
-              <a:buNone/>
-            </a:pPr>
             <a:r>
               <a:rPr lang="en-US" sz="1400" dirty="0">
                 <a:solidFill>
@@ -3565,9 +3529,6 @@
               </a:rPr>
               <a:t>上车 </a:t>
             </a:r>
-            <a:pPr algn="l" indent="0" marL="0">
-              <a:buNone/>
-            </a:pPr>
             <a:r>
               <a:rPr lang="en-US" sz="1400" b="1" dirty="0">
                 <a:solidFill>
@@ -3579,9 +3540,6 @@
               </a:rPr>
               <a:t>↔</a:t>
             </a:r>
-            <a:pPr algn="l" indent="0" marL="0">
-              <a:buNone/>
-            </a:pPr>
             <a:r>
               <a:rPr lang="en-US" sz="1400" dirty="0">
                 <a:solidFill>
@@ -4995,6 +4953,166 @@
               </a:rPr>
               <a:t>zuò </a:t>
             </a:r>
+            <a:r>
+              <a:rPr lang="en-US" sz="1000" dirty="0">
+                <a:solidFill>
+                  <a:srgbClr val="8B94A3"/>
+                </a:solidFill>
+                <a:latin typeface="Noto Sans SC" pitchFamily="34" charset="0"/>
+                <a:ea typeface="Noto Sans SC" pitchFamily="34" charset="-122"/>
+                <a:cs typeface="Noto Sans SC" pitchFamily="34" charset="-120"/>
+              </a:rPr>
+              <a:t>/</a:t>
+            </a:r>
+            <a:r>
+              <a:rPr lang="en-US" sz="1000" dirty="0">
+                <a:solidFill>
+                  <a:srgbClr val="3A7D8C"/>
+                </a:solidFill>
+                <a:latin typeface="Noto Sans SC" pitchFamily="34" charset="0"/>
+                <a:ea typeface="Noto Sans SC" pitchFamily="34" charset="-122"/>
+                <a:cs typeface="Noto Sans SC" pitchFamily="34" charset="-120"/>
+              </a:rPr>
+              <a:t> zòu</a:t>
+            </a:r>
+            <a:endParaRPr lang="en-US" sz="1000" dirty="0"/>
+          </a:p>
+        </p:txBody>
+      </p:sp>
+      <p:sp>
+        <p:nvSpPr>
+          <p:cNvPr id="29" name="Text 27"/>
+          <p:cNvSpPr/>
+          <p:nvPr/>
+        </p:nvSpPr>
+        <p:spPr>
+          <a:xfrm>
+            <a:off x="2476351" y="2847677"/>
+            <a:ext cx="1714649" cy="1031677"/>
+          </a:xfrm>
+          <a:prstGeom prst="roundRect">
+            <a:avLst>
+              <a:gd name="adj" fmla="val 9848"/>
+            </a:avLst>
+          </a:prstGeom>
+          <a:solidFill>
+            <a:srgbClr val="F6F2E8"/>
+          </a:solidFill>
+          <a:ln/>
+        </p:spPr>
+        <p:txBody>
+          <a:bodyPr wrap="square" rtlCol="0" anchor="ctr"/>
+          <a:lstStyle/>
+          <a:p>
+            <a:pPr indent="0" marL="0">
+              <a:buNone/>
+            </a:pPr>
+            <a:endParaRPr lang="en-US" dirty="0"/>
+          </a:p>
+        </p:txBody>
+      </p:sp>
+      <p:sp>
+        <p:nvSpPr>
+          <p:cNvPr id="30" name="Text 28"/>
+          <p:cNvSpPr/>
+          <p:nvPr/>
+        </p:nvSpPr>
+        <p:spPr>
+          <a:xfrm>
+            <a:off x="2510970" y="2974628"/>
+            <a:ext cx="1645411" cy="142875"/>
+          </a:xfrm>
+          <a:prstGeom prst="rect">
+            <a:avLst/>
+          </a:prstGeom>
+          <a:noFill/>
+          <a:ln/>
+        </p:spPr>
+        <p:txBody>
+          <a:bodyPr wrap="square" lIns="0" tIns="0" rIns="0" bIns="0" rtlCol="0" anchor="t"/>
+          <a:lstStyle/>
+          <a:p>
+            <a:pPr algn="ctr" indent="0" marL="0">
+              <a:spcAft>
+                <a:spcPts val="400"/>
+              </a:spcAft>
+              <a:buNone/>
+            </a:pPr>
+            <a:r>
+              <a:rPr lang="en-US" sz="800" b="1" dirty="0">
+                <a:solidFill>
+                  <a:srgbClr val="3A7D8C"/>
+                </a:solidFill>
+                <a:latin typeface="Noto Sans SC" pitchFamily="34" charset="0"/>
+                <a:ea typeface="Noto Sans SC" pitchFamily="34" charset="-122"/>
+                <a:cs typeface="Noto Sans SC" pitchFamily="34" charset="-120"/>
+              </a:rPr>
+              <a:t>ROUND 2</a:t>
+            </a:r>
+            <a:endParaRPr lang="en-US" sz="800" dirty="0"/>
+          </a:p>
+        </p:txBody>
+      </p:sp>
+      <p:sp>
+        <p:nvSpPr>
+          <p:cNvPr id="31" name="Text 29"/>
+          <p:cNvSpPr/>
+          <p:nvPr/>
+        </p:nvSpPr>
+        <p:spPr>
+          <a:xfrm>
+            <a:off x="2510970" y="3168253"/>
+            <a:ext cx="1645411" cy="352425"/>
+          </a:xfrm>
+          <a:prstGeom prst="rect">
+            <a:avLst/>
+          </a:prstGeom>
+          <a:noFill/>
+          <a:ln/>
+        </p:spPr>
+        <p:txBody>
+          <a:bodyPr wrap="square" lIns="0" tIns="0" rIns="0" bIns="0" rtlCol="0" anchor="t"/>
+          <a:lstStyle/>
+          <a:p>
+            <a:pPr algn="ctr" indent="0" marL="0">
+              <a:buNone/>
+            </a:pPr>
+            <a:r>
+              <a:rPr lang="en-US" sz="2000" b="1" dirty="0">
+                <a:solidFill>
+                  <a:srgbClr val="1E2A38"/>
+                </a:solidFill>
+                <a:latin typeface="Noto Serif SC" pitchFamily="34" charset="0"/>
+                <a:ea typeface="Noto Serif SC" pitchFamily="34" charset="-122"/>
+                <a:cs typeface="Noto Serif SC" pitchFamily="34" charset="-120"/>
+              </a:rPr>
+              <a:t>分</a:t>
+            </a:r>
+            <a:endParaRPr lang="en-US" sz="2000" dirty="0"/>
+          </a:p>
+        </p:txBody>
+      </p:sp>
+      <p:sp>
+        <p:nvSpPr>
+          <p:cNvPr id="32" name="Text 30"/>
+          <p:cNvSpPr/>
+          <p:nvPr/>
+        </p:nvSpPr>
+        <p:spPr>
+          <a:xfrm>
+            <a:off x="2510970" y="3571429"/>
+            <a:ext cx="1645411" cy="180975"/>
+          </a:xfrm>
+          <a:prstGeom prst="rect">
+            <a:avLst/>
+          </a:prstGeom>
+          <a:noFill/>
+          <a:ln/>
+        </p:spPr>
+        <p:txBody>
+          <a:bodyPr wrap="square" lIns="0" tIns="0" rIns="0" bIns="0" rtlCol="0" anchor="t"/>
+          <a:lstStyle/>
+          <a:p>
             <a:pPr algn="ctr" indent="0" marL="0">
               <a:spcBef>
                 <a:spcPts val="400"/>
@@ -5004,6 +5122,17 @@
             <a:r>
               <a:rPr lang="en-US" sz="1000" dirty="0">
                 <a:solidFill>
+                  <a:srgbClr val="3A7D8C"/>
+                </a:solidFill>
+                <a:latin typeface="Noto Sans SC" pitchFamily="34" charset="0"/>
+                <a:ea typeface="Noto Sans SC" pitchFamily="34" charset="-122"/>
+                <a:cs typeface="Noto Sans SC" pitchFamily="34" charset="-120"/>
+              </a:rPr>
+              <a:t>fēn </a:t>
+            </a:r>
+            <a:r>
+              <a:rPr lang="en-US" sz="1000" dirty="0">
+                <a:solidFill>
                   <a:srgbClr val="8B94A3"/>
                 </a:solidFill>
                 <a:latin typeface="Noto Sans SC" pitchFamily="34" charset="0"/>
@@ -5012,6 +5141,155 @@
               </a:rPr>
               <a:t>/</a:t>
             </a:r>
+            <a:r>
+              <a:rPr lang="en-US" sz="1000" dirty="0">
+                <a:solidFill>
+                  <a:srgbClr val="3A7D8C"/>
+                </a:solidFill>
+                <a:latin typeface="Noto Sans SC" pitchFamily="34" charset="0"/>
+                <a:ea typeface="Noto Sans SC" pitchFamily="34" charset="-122"/>
+                <a:cs typeface="Noto Sans SC" pitchFamily="34" charset="-120"/>
+              </a:rPr>
+              <a:t> fān</a:t>
+            </a:r>
+            <a:endParaRPr lang="en-US" sz="1000" dirty="0"/>
+          </a:p>
+        </p:txBody>
+      </p:sp>
+      <p:sp>
+        <p:nvSpPr>
+          <p:cNvPr id="33" name="Text 31"/>
+          <p:cNvSpPr/>
+          <p:nvPr/>
+        </p:nvSpPr>
+        <p:spPr>
+          <a:xfrm>
+            <a:off x="4317950" y="2847677"/>
+            <a:ext cx="1714500" cy="1031677"/>
+          </a:xfrm>
+          <a:prstGeom prst="roundRect">
+            <a:avLst>
+              <a:gd name="adj" fmla="val 9848"/>
+            </a:avLst>
+          </a:prstGeom>
+          <a:solidFill>
+            <a:srgbClr val="F6F2E8"/>
+          </a:solidFill>
+          <a:ln/>
+        </p:spPr>
+        <p:txBody>
+          <a:bodyPr wrap="square" rtlCol="0" anchor="ctr"/>
+          <a:lstStyle/>
+          <a:p>
+            <a:pPr indent="0" marL="0">
+              <a:buNone/>
+            </a:pPr>
+            <a:endParaRPr lang="en-US" dirty="0"/>
+          </a:p>
+        </p:txBody>
+      </p:sp>
+      <p:sp>
+        <p:nvSpPr>
+          <p:cNvPr id="34" name="Text 32"/>
+          <p:cNvSpPr/>
+          <p:nvPr/>
+        </p:nvSpPr>
+        <p:spPr>
+          <a:xfrm>
+            <a:off x="4352571" y="2974628"/>
+            <a:ext cx="1645259" cy="142875"/>
+          </a:xfrm>
+          <a:prstGeom prst="rect">
+            <a:avLst/>
+          </a:prstGeom>
+          <a:noFill/>
+          <a:ln/>
+        </p:spPr>
+        <p:txBody>
+          <a:bodyPr wrap="square" lIns="0" tIns="0" rIns="0" bIns="0" rtlCol="0" anchor="t"/>
+          <a:lstStyle/>
+          <a:p>
+            <a:pPr algn="ctr" indent="0" marL="0">
+              <a:spcAft>
+                <a:spcPts val="400"/>
+              </a:spcAft>
+              <a:buNone/>
+            </a:pPr>
+            <a:r>
+              <a:rPr lang="en-US" sz="800" b="1" dirty="0">
+                <a:solidFill>
+                  <a:srgbClr val="3A7D8C"/>
+                </a:solidFill>
+                <a:latin typeface="Noto Sans SC" pitchFamily="34" charset="0"/>
+                <a:ea typeface="Noto Sans SC" pitchFamily="34" charset="-122"/>
+                <a:cs typeface="Noto Sans SC" pitchFamily="34" charset="-120"/>
+              </a:rPr>
+              <a:t>ROUND 3</a:t>
+            </a:r>
+            <a:endParaRPr lang="en-US" sz="800" dirty="0"/>
+          </a:p>
+        </p:txBody>
+      </p:sp>
+      <p:sp>
+        <p:nvSpPr>
+          <p:cNvPr id="35" name="Text 33"/>
+          <p:cNvSpPr/>
+          <p:nvPr/>
+        </p:nvSpPr>
+        <p:spPr>
+          <a:xfrm>
+            <a:off x="4352571" y="3168253"/>
+            <a:ext cx="1645259" cy="352425"/>
+          </a:xfrm>
+          <a:prstGeom prst="rect">
+            <a:avLst/>
+          </a:prstGeom>
+          <a:noFill/>
+          <a:ln/>
+        </p:spPr>
+        <p:txBody>
+          <a:bodyPr wrap="square" lIns="0" tIns="0" rIns="0" bIns="0" rtlCol="0" anchor="t"/>
+          <a:lstStyle/>
+          <a:p>
+            <a:pPr algn="ctr" indent="0" marL="0">
+              <a:buNone/>
+            </a:pPr>
+            <a:r>
+              <a:rPr lang="en-US" sz="2000" b="1" dirty="0">
+                <a:solidFill>
+                  <a:srgbClr val="1E2A38"/>
+                </a:solidFill>
+                <a:latin typeface="Noto Serif SC" pitchFamily="34" charset="0"/>
+                <a:ea typeface="Noto Serif SC" pitchFamily="34" charset="-122"/>
+                <a:cs typeface="Noto Serif SC" pitchFamily="34" charset="-120"/>
+              </a:rPr>
+              <a:t>谁</a:t>
+            </a:r>
+            <a:endParaRPr lang="en-US" sz="2000" dirty="0"/>
+          </a:p>
+        </p:txBody>
+      </p:sp>
+      <p:sp>
+        <p:nvSpPr>
+          <p:cNvPr id="36" name="Text 34"/>
+          <p:cNvSpPr/>
+          <p:nvPr/>
+        </p:nvSpPr>
+        <p:spPr>
+          <a:xfrm>
+            <a:off x="4352571" y="3571429"/>
+            <a:ext cx="1645259" cy="180975"/>
+          </a:xfrm>
+          <a:prstGeom prst="rect">
+            <a:avLst/>
+          </a:prstGeom>
+          <a:noFill/>
+          <a:ln/>
+        </p:spPr>
+        <p:txBody>
+          <a:bodyPr wrap="square" lIns="0" tIns="0" rIns="0" bIns="0" rtlCol="0" anchor="t"/>
+          <a:lstStyle/>
+          <a:p>
             <a:pPr algn="ctr" indent="0" marL="0">
               <a:spcBef>
                 <a:spcPts val="400"/>
@@ -5027,7 +5305,29 @@
                 <a:ea typeface="Noto Sans SC" pitchFamily="34" charset="-122"/>
                 <a:cs typeface="Noto Sans SC" pitchFamily="34" charset="-120"/>
               </a:rPr>
-              <a:t> zòu</a:t>
+              <a:t>suí </a:t>
+            </a:r>
+            <a:r>
+              <a:rPr lang="en-US" sz="1000" dirty="0">
+                <a:solidFill>
+                  <a:srgbClr val="8B94A3"/>
+                </a:solidFill>
+                <a:latin typeface="Noto Sans SC" pitchFamily="34" charset="0"/>
+                <a:ea typeface="Noto Sans SC" pitchFamily="34" charset="-122"/>
+                <a:cs typeface="Noto Sans SC" pitchFamily="34" charset="-120"/>
+              </a:rPr>
+              <a:t>/</a:t>
+            </a:r>
+            <a:r>
+              <a:rPr lang="en-US" sz="1000" dirty="0">
+                <a:solidFill>
+                  <a:srgbClr val="3A7D8C"/>
+                </a:solidFill>
+                <a:latin typeface="Noto Sans SC" pitchFamily="34" charset="0"/>
+                <a:ea typeface="Noto Sans SC" pitchFamily="34" charset="-122"/>
+                <a:cs typeface="Noto Sans SC" pitchFamily="34" charset="-120"/>
+              </a:rPr>
+              <a:t> shuí</a:t>
             </a:r>
             <a:endParaRPr lang="en-US" sz="1000" dirty="0"/>
           </a:p>
@@ -5035,13 +5335,13 @@
       </p:sp>
       <p:sp>
         <p:nvSpPr>
-          <p:cNvPr id="29" name="Text 27"/>
-          <p:cNvSpPr/>
-          <p:nvPr/>
-        </p:nvSpPr>
-        <p:spPr>
-          <a:xfrm>
-            <a:off x="2476351" y="2847677"/>
+          <p:cNvPr id="37" name="Text 35"/>
+          <p:cNvSpPr/>
+          <p:nvPr/>
+        </p:nvSpPr>
+        <p:spPr>
+          <a:xfrm>
+            <a:off x="6159401" y="2847677"/>
             <a:ext cx="1714649" cy="1031677"/>
           </a:xfrm>
           <a:prstGeom prst="roundRect">
@@ -5067,13 +5367,13 @@
       </p:sp>
       <p:sp>
         <p:nvSpPr>
-          <p:cNvPr id="30" name="Text 28"/>
-          <p:cNvSpPr/>
-          <p:nvPr/>
-        </p:nvSpPr>
-        <p:spPr>
-          <a:xfrm>
-            <a:off x="2510970" y="2974628"/>
+          <p:cNvPr id="38" name="Text 36"/>
+          <p:cNvSpPr/>
+          <p:nvPr/>
+        </p:nvSpPr>
+        <p:spPr>
+          <a:xfrm>
+            <a:off x="6194020" y="2974628"/>
             <a:ext cx="1645411" cy="142875"/>
           </a:xfrm>
           <a:prstGeom prst="rect">
@@ -5101,7 +5401,7 @@
                 <a:ea typeface="Noto Sans SC" pitchFamily="34" charset="-122"/>
                 <a:cs typeface="Noto Sans SC" pitchFamily="34" charset="-120"/>
               </a:rPr>
-              <a:t>ROUND 2</a:t>
+              <a:t>ROUND 4</a:t>
             </a:r>
             <a:endParaRPr lang="en-US" sz="800" dirty="0"/>
           </a:p>
@@ -5109,13 +5409,13 @@
       </p:sp>
       <p:sp>
         <p:nvSpPr>
-          <p:cNvPr id="31" name="Text 29"/>
-          <p:cNvSpPr/>
-          <p:nvPr/>
-        </p:nvSpPr>
-        <p:spPr>
-          <a:xfrm>
-            <a:off x="2510970" y="3168253"/>
+          <p:cNvPr id="39" name="Text 37"/>
+          <p:cNvSpPr/>
+          <p:nvPr/>
+        </p:nvSpPr>
+        <p:spPr>
+          <a:xfrm>
+            <a:off x="6194020" y="3168253"/>
             <a:ext cx="1645411" cy="352425"/>
           </a:xfrm>
           <a:prstGeom prst="rect">
@@ -5140,7 +5440,7 @@
                 <a:ea typeface="Noto Serif SC" pitchFamily="34" charset="-122"/>
                 <a:cs typeface="Noto Serif SC" pitchFamily="34" charset="-120"/>
               </a:rPr>
-              <a:t>分</a:t>
+              <a:t>点</a:t>
             </a:r>
             <a:endParaRPr lang="en-US" sz="2000" dirty="0"/>
           </a:p>
@@ -5148,13 +5448,13 @@
       </p:sp>
       <p:sp>
         <p:nvSpPr>
-          <p:cNvPr id="32" name="Text 30"/>
-          <p:cNvSpPr/>
-          <p:nvPr/>
-        </p:nvSpPr>
-        <p:spPr>
-          <a:xfrm>
-            <a:off x="2510970" y="3571429"/>
+          <p:cNvPr id="40" name="Text 38"/>
+          <p:cNvSpPr/>
+          <p:nvPr/>
+        </p:nvSpPr>
+        <p:spPr>
+          <a:xfrm>
+            <a:off x="6194020" y="3571429"/>
             <a:ext cx="1645411" cy="180975"/>
           </a:xfrm>
           <a:prstGeom prst="rect">
@@ -5182,8 +5482,168 @@
                 <a:ea typeface="Noto Sans SC" pitchFamily="34" charset="-122"/>
                 <a:cs typeface="Noto Sans SC" pitchFamily="34" charset="-120"/>
               </a:rPr>
-              <a:t>fēn </a:t>
-            </a:r>
+              <a:t>dǎn </a:t>
+            </a:r>
+            <a:r>
+              <a:rPr lang="en-US" sz="1000" dirty="0">
+                <a:solidFill>
+                  <a:srgbClr val="8B94A3"/>
+                </a:solidFill>
+                <a:latin typeface="Noto Sans SC" pitchFamily="34" charset="0"/>
+                <a:ea typeface="Noto Sans SC" pitchFamily="34" charset="-122"/>
+                <a:cs typeface="Noto Sans SC" pitchFamily="34" charset="-120"/>
+              </a:rPr>
+              <a:t>/</a:t>
+            </a:r>
+            <a:r>
+              <a:rPr lang="en-US" sz="1000" dirty="0">
+                <a:solidFill>
+                  <a:srgbClr val="3A7D8C"/>
+                </a:solidFill>
+                <a:latin typeface="Noto Sans SC" pitchFamily="34" charset="0"/>
+                <a:ea typeface="Noto Sans SC" pitchFamily="34" charset="-122"/>
+                <a:cs typeface="Noto Sans SC" pitchFamily="34" charset="-120"/>
+              </a:rPr>
+              <a:t> diǎn</a:t>
+            </a:r>
+            <a:endParaRPr lang="en-US" sz="1000" dirty="0"/>
+          </a:p>
+        </p:txBody>
+      </p:sp>
+      <p:sp>
+        <p:nvSpPr>
+          <p:cNvPr id="41" name="Text 39"/>
+          <p:cNvSpPr/>
+          <p:nvPr/>
+        </p:nvSpPr>
+        <p:spPr>
+          <a:xfrm>
+            <a:off x="8001000" y="2847677"/>
+            <a:ext cx="1714500" cy="1031677"/>
+          </a:xfrm>
+          <a:prstGeom prst="roundRect">
+            <a:avLst>
+              <a:gd name="adj" fmla="val 9848"/>
+            </a:avLst>
+          </a:prstGeom>
+          <a:solidFill>
+            <a:srgbClr val="F6F2E8"/>
+          </a:solidFill>
+          <a:ln/>
+        </p:spPr>
+        <p:txBody>
+          <a:bodyPr wrap="square" rtlCol="0" anchor="ctr"/>
+          <a:lstStyle/>
+          <a:p>
+            <a:pPr indent="0" marL="0">
+              <a:buNone/>
+            </a:pPr>
+            <a:endParaRPr lang="en-US" dirty="0"/>
+          </a:p>
+        </p:txBody>
+      </p:sp>
+      <p:sp>
+        <p:nvSpPr>
+          <p:cNvPr id="42" name="Text 40"/>
+          <p:cNvSpPr/>
+          <p:nvPr/>
+        </p:nvSpPr>
+        <p:spPr>
+          <a:xfrm>
+            <a:off x="8035620" y="2974628"/>
+            <a:ext cx="1645259" cy="142875"/>
+          </a:xfrm>
+          <a:prstGeom prst="rect">
+            <a:avLst/>
+          </a:prstGeom>
+          <a:noFill/>
+          <a:ln/>
+        </p:spPr>
+        <p:txBody>
+          <a:bodyPr wrap="square" lIns="0" tIns="0" rIns="0" bIns="0" rtlCol="0" anchor="t"/>
+          <a:lstStyle/>
+          <a:p>
+            <a:pPr algn="ctr" indent="0" marL="0">
+              <a:spcAft>
+                <a:spcPts val="400"/>
+              </a:spcAft>
+              <a:buNone/>
+            </a:pPr>
+            <a:r>
+              <a:rPr lang="en-US" sz="800" b="1" dirty="0">
+                <a:solidFill>
+                  <a:srgbClr val="3A7D8C"/>
+                </a:solidFill>
+                <a:latin typeface="Noto Sans SC" pitchFamily="34" charset="0"/>
+                <a:ea typeface="Noto Sans SC" pitchFamily="34" charset="-122"/>
+                <a:cs typeface="Noto Sans SC" pitchFamily="34" charset="-120"/>
+              </a:rPr>
+              <a:t>ROUND 5</a:t>
+            </a:r>
+            <a:endParaRPr lang="en-US" sz="800" dirty="0"/>
+          </a:p>
+        </p:txBody>
+      </p:sp>
+      <p:sp>
+        <p:nvSpPr>
+          <p:cNvPr id="43" name="Text 41"/>
+          <p:cNvSpPr/>
+          <p:nvPr/>
+        </p:nvSpPr>
+        <p:spPr>
+          <a:xfrm>
+            <a:off x="8035620" y="3168253"/>
+            <a:ext cx="1645259" cy="352425"/>
+          </a:xfrm>
+          <a:prstGeom prst="rect">
+            <a:avLst/>
+          </a:prstGeom>
+          <a:noFill/>
+          <a:ln/>
+        </p:spPr>
+        <p:txBody>
+          <a:bodyPr wrap="square" lIns="0" tIns="0" rIns="0" bIns="0" rtlCol="0" anchor="t"/>
+          <a:lstStyle/>
+          <a:p>
+            <a:pPr algn="ctr" indent="0" marL="0">
+              <a:buNone/>
+            </a:pPr>
+            <a:r>
+              <a:rPr lang="en-US" sz="2000" b="1" dirty="0">
+                <a:solidFill>
+                  <a:srgbClr val="1E2A38"/>
+                </a:solidFill>
+                <a:latin typeface="Noto Serif SC" pitchFamily="34" charset="0"/>
+                <a:ea typeface="Noto Serif SC" pitchFamily="34" charset="-122"/>
+                <a:cs typeface="Noto Serif SC" pitchFamily="34" charset="-120"/>
+              </a:rPr>
+              <a:t>住</a:t>
+            </a:r>
+            <a:endParaRPr lang="en-US" sz="2000" dirty="0"/>
+          </a:p>
+        </p:txBody>
+      </p:sp>
+      <p:sp>
+        <p:nvSpPr>
+          <p:cNvPr id="44" name="Text 42"/>
+          <p:cNvSpPr/>
+          <p:nvPr/>
+        </p:nvSpPr>
+        <p:spPr>
+          <a:xfrm>
+            <a:off x="8035620" y="3571429"/>
+            <a:ext cx="1645259" cy="180975"/>
+          </a:xfrm>
+          <a:prstGeom prst="rect">
+            <a:avLst/>
+          </a:prstGeom>
+          <a:noFill/>
+          <a:ln/>
+        </p:spPr>
+        <p:txBody>
+          <a:bodyPr wrap="square" lIns="0" tIns="0" rIns="0" bIns="0" rtlCol="0" anchor="t"/>
+          <a:lstStyle/>
+          <a:p>
             <a:pPr algn="ctr" indent="0" marL="0">
               <a:spcBef>
                 <a:spcPts val="400"/>
@@ -5193,6 +5653,17 @@
             <a:r>
               <a:rPr lang="en-US" sz="1000" dirty="0">
                 <a:solidFill>
+                  <a:srgbClr val="3A7D8C"/>
+                </a:solidFill>
+                <a:latin typeface="Noto Sans SC" pitchFamily="34" charset="0"/>
+                <a:ea typeface="Noto Sans SC" pitchFamily="34" charset="-122"/>
+                <a:cs typeface="Noto Sans SC" pitchFamily="34" charset="-120"/>
+              </a:rPr>
+              <a:t>zhù </a:t>
+            </a:r>
+            <a:r>
+              <a:rPr lang="en-US" sz="1000" dirty="0">
+                <a:solidFill>
                   <a:srgbClr val="8B94A3"/>
                 </a:solidFill>
                 <a:latin typeface="Noto Sans SC" pitchFamily="34" charset="0"/>
@@ -5201,6 +5672,155 @@
               </a:rPr>
               <a:t>/</a:t>
             </a:r>
+            <a:r>
+              <a:rPr lang="en-US" sz="1000" dirty="0">
+                <a:solidFill>
+                  <a:srgbClr val="3A7D8C"/>
+                </a:solidFill>
+                <a:latin typeface="Noto Sans SC" pitchFamily="34" charset="0"/>
+                <a:ea typeface="Noto Sans SC" pitchFamily="34" charset="-122"/>
+                <a:cs typeface="Noto Sans SC" pitchFamily="34" charset="-120"/>
+              </a:rPr>
+              <a:t> jù</a:t>
+            </a:r>
+            <a:endParaRPr lang="en-US" sz="1000" dirty="0"/>
+          </a:p>
+        </p:txBody>
+      </p:sp>
+      <p:sp>
+        <p:nvSpPr>
+          <p:cNvPr id="45" name="Text 43"/>
+          <p:cNvSpPr/>
+          <p:nvPr/>
+        </p:nvSpPr>
+        <p:spPr>
+          <a:xfrm>
+            <a:off x="9842450" y="2847677"/>
+            <a:ext cx="1714649" cy="1031677"/>
+          </a:xfrm>
+          <a:prstGeom prst="roundRect">
+            <a:avLst>
+              <a:gd name="adj" fmla="val 9848"/>
+            </a:avLst>
+          </a:prstGeom>
+          <a:solidFill>
+            <a:srgbClr val="F6F2E8"/>
+          </a:solidFill>
+          <a:ln/>
+        </p:spPr>
+        <p:txBody>
+          <a:bodyPr wrap="square" rtlCol="0" anchor="ctr"/>
+          <a:lstStyle/>
+          <a:p>
+            <a:pPr indent="0" marL="0">
+              <a:buNone/>
+            </a:pPr>
+            <a:endParaRPr lang="en-US" dirty="0"/>
+          </a:p>
+        </p:txBody>
+      </p:sp>
+      <p:sp>
+        <p:nvSpPr>
+          <p:cNvPr id="46" name="Text 44"/>
+          <p:cNvSpPr/>
+          <p:nvPr/>
+        </p:nvSpPr>
+        <p:spPr>
+          <a:xfrm>
+            <a:off x="9877069" y="2974628"/>
+            <a:ext cx="1645411" cy="142875"/>
+          </a:xfrm>
+          <a:prstGeom prst="rect">
+            <a:avLst/>
+          </a:prstGeom>
+          <a:noFill/>
+          <a:ln/>
+        </p:spPr>
+        <p:txBody>
+          <a:bodyPr wrap="square" lIns="0" tIns="0" rIns="0" bIns="0" rtlCol="0" anchor="t"/>
+          <a:lstStyle/>
+          <a:p>
+            <a:pPr algn="ctr" indent="0" marL="0">
+              <a:spcAft>
+                <a:spcPts val="400"/>
+              </a:spcAft>
+              <a:buNone/>
+            </a:pPr>
+            <a:r>
+              <a:rPr lang="en-US" sz="800" b="1" dirty="0">
+                <a:solidFill>
+                  <a:srgbClr val="3A7D8C"/>
+                </a:solidFill>
+                <a:latin typeface="Noto Sans SC" pitchFamily="34" charset="0"/>
+                <a:ea typeface="Noto Sans SC" pitchFamily="34" charset="-122"/>
+                <a:cs typeface="Noto Sans SC" pitchFamily="34" charset="-120"/>
+              </a:rPr>
+              <a:t>ROUND 6</a:t>
+            </a:r>
+            <a:endParaRPr lang="en-US" sz="800" dirty="0"/>
+          </a:p>
+        </p:txBody>
+      </p:sp>
+      <p:sp>
+        <p:nvSpPr>
+          <p:cNvPr id="47" name="Text 45"/>
+          <p:cNvSpPr/>
+          <p:nvPr/>
+        </p:nvSpPr>
+        <p:spPr>
+          <a:xfrm>
+            <a:off x="9877069" y="3168253"/>
+            <a:ext cx="1645411" cy="352425"/>
+          </a:xfrm>
+          <a:prstGeom prst="rect">
+            <a:avLst/>
+          </a:prstGeom>
+          <a:noFill/>
+          <a:ln/>
+        </p:spPr>
+        <p:txBody>
+          <a:bodyPr wrap="square" lIns="0" tIns="0" rIns="0" bIns="0" rtlCol="0" anchor="t"/>
+          <a:lstStyle/>
+          <a:p>
+            <a:pPr algn="ctr" indent="0" marL="0">
+              <a:buNone/>
+            </a:pPr>
+            <a:r>
+              <a:rPr lang="en-US" sz="2000" b="1" dirty="0">
+                <a:solidFill>
+                  <a:srgbClr val="1E2A38"/>
+                </a:solidFill>
+                <a:latin typeface="Noto Serif SC" pitchFamily="34" charset="0"/>
+                <a:ea typeface="Noto Serif SC" pitchFamily="34" charset="-122"/>
+                <a:cs typeface="Noto Serif SC" pitchFamily="34" charset="-120"/>
+              </a:rPr>
+              <a:t>年</a:t>
+            </a:r>
+            <a:endParaRPr lang="en-US" sz="2000" dirty="0"/>
+          </a:p>
+        </p:txBody>
+      </p:sp>
+      <p:sp>
+        <p:nvSpPr>
+          <p:cNvPr id="48" name="Text 46"/>
+          <p:cNvSpPr/>
+          <p:nvPr/>
+        </p:nvSpPr>
+        <p:spPr>
+          <a:xfrm>
+            <a:off x="9877069" y="3571429"/>
+            <a:ext cx="1645411" cy="180975"/>
+          </a:xfrm>
+          <a:prstGeom prst="rect">
+            <a:avLst/>
+          </a:prstGeom>
+          <a:noFill/>
+          <a:ln/>
+        </p:spPr>
+        <p:txBody>
+          <a:bodyPr wrap="square" lIns="0" tIns="0" rIns="0" bIns="0" rtlCol="0" anchor="t"/>
+          <a:lstStyle/>
+          <a:p>
             <a:pPr algn="ctr" indent="0" marL="0">
               <a:spcBef>
                 <a:spcPts val="400"/>
@@ -5216,172 +5836,11 @@
                 <a:ea typeface="Noto Sans SC" pitchFamily="34" charset="-122"/>
                 <a:cs typeface="Noto Sans SC" pitchFamily="34" charset="-120"/>
               </a:rPr>
-              <a:t> fān</a:t>
-            </a:r>
-            <a:endParaRPr lang="en-US" sz="1000" dirty="0"/>
-          </a:p>
-        </p:txBody>
-      </p:sp>
-      <p:sp>
-        <p:nvSpPr>
-          <p:cNvPr id="33" name="Text 31"/>
-          <p:cNvSpPr/>
-          <p:nvPr/>
-        </p:nvSpPr>
-        <p:spPr>
-          <a:xfrm>
-            <a:off x="4317950" y="2847677"/>
-            <a:ext cx="1714500" cy="1031677"/>
-          </a:xfrm>
-          <a:prstGeom prst="roundRect">
-            <a:avLst>
-              <a:gd name="adj" fmla="val 9848"/>
-            </a:avLst>
-          </a:prstGeom>
-          <a:solidFill>
-            <a:srgbClr val="F6F2E8"/>
-          </a:solidFill>
-          <a:ln/>
-        </p:spPr>
-        <p:txBody>
-          <a:bodyPr wrap="square" rtlCol="0" anchor="ctr"/>
-          <a:lstStyle/>
-          <a:p>
-            <a:pPr indent="0" marL="0">
-              <a:buNone/>
-            </a:pPr>
-            <a:endParaRPr lang="en-US" dirty="0"/>
-          </a:p>
-        </p:txBody>
-      </p:sp>
-      <p:sp>
-        <p:nvSpPr>
-          <p:cNvPr id="34" name="Text 32"/>
-          <p:cNvSpPr/>
-          <p:nvPr/>
-        </p:nvSpPr>
-        <p:spPr>
-          <a:xfrm>
-            <a:off x="4352571" y="2974628"/>
-            <a:ext cx="1645259" cy="142875"/>
-          </a:xfrm>
-          <a:prstGeom prst="rect">
-            <a:avLst/>
-          </a:prstGeom>
-          <a:noFill/>
-          <a:ln/>
-        </p:spPr>
-        <p:txBody>
-          <a:bodyPr wrap="square" lIns="0" tIns="0" rIns="0" bIns="0" rtlCol="0" anchor="t"/>
-          <a:lstStyle/>
-          <a:p>
-            <a:pPr algn="ctr" indent="0" marL="0">
-              <a:spcAft>
-                <a:spcPts val="400"/>
-              </a:spcAft>
-              <a:buNone/>
-            </a:pPr>
-            <a:r>
-              <a:rPr lang="en-US" sz="800" b="1" dirty="0">
-                <a:solidFill>
-                  <a:srgbClr val="3A7D8C"/>
-                </a:solidFill>
-                <a:latin typeface="Noto Sans SC" pitchFamily="34" charset="0"/>
-                <a:ea typeface="Noto Sans SC" pitchFamily="34" charset="-122"/>
-                <a:cs typeface="Noto Sans SC" pitchFamily="34" charset="-120"/>
-              </a:rPr>
-              <a:t>ROUND 3</a:t>
-            </a:r>
-            <a:endParaRPr lang="en-US" sz="800" dirty="0"/>
-          </a:p>
-        </p:txBody>
-      </p:sp>
-      <p:sp>
-        <p:nvSpPr>
-          <p:cNvPr id="35" name="Text 33"/>
-          <p:cNvSpPr/>
-          <p:nvPr/>
-        </p:nvSpPr>
-        <p:spPr>
-          <a:xfrm>
-            <a:off x="4352571" y="3168253"/>
-            <a:ext cx="1645259" cy="352425"/>
-          </a:xfrm>
-          <a:prstGeom prst="rect">
-            <a:avLst/>
-          </a:prstGeom>
-          <a:noFill/>
-          <a:ln/>
-        </p:spPr>
-        <p:txBody>
-          <a:bodyPr wrap="square" lIns="0" tIns="0" rIns="0" bIns="0" rtlCol="0" anchor="t"/>
-          <a:lstStyle/>
-          <a:p>
-            <a:pPr algn="ctr" indent="0" marL="0">
-              <a:buNone/>
-            </a:pPr>
-            <a:r>
-              <a:rPr lang="en-US" sz="2000" b="1" dirty="0">
-                <a:solidFill>
-                  <a:srgbClr val="1E2A38"/>
-                </a:solidFill>
-                <a:latin typeface="Noto Serif SC" pitchFamily="34" charset="0"/>
-                <a:ea typeface="Noto Serif SC" pitchFamily="34" charset="-122"/>
-                <a:cs typeface="Noto Serif SC" pitchFamily="34" charset="-120"/>
-              </a:rPr>
-              <a:t>谁</a:t>
-            </a:r>
-            <a:endParaRPr lang="en-US" sz="2000" dirty="0"/>
-          </a:p>
-        </p:txBody>
-      </p:sp>
-      <p:sp>
-        <p:nvSpPr>
-          <p:cNvPr id="36" name="Text 34"/>
-          <p:cNvSpPr/>
-          <p:nvPr/>
-        </p:nvSpPr>
-        <p:spPr>
-          <a:xfrm>
-            <a:off x="4352571" y="3571429"/>
-            <a:ext cx="1645259" cy="180975"/>
-          </a:xfrm>
-          <a:prstGeom prst="rect">
-            <a:avLst/>
-          </a:prstGeom>
-          <a:noFill/>
-          <a:ln/>
-        </p:spPr>
-        <p:txBody>
-          <a:bodyPr wrap="square" lIns="0" tIns="0" rIns="0" bIns="0" rtlCol="0" anchor="t"/>
-          <a:lstStyle/>
-          <a:p>
-            <a:pPr algn="ctr" indent="0" marL="0">
-              <a:spcBef>
-                <a:spcPts val="400"/>
-              </a:spcBef>
-              <a:buNone/>
-            </a:pPr>
+              <a:t>nián </a:t>
+            </a:r>
             <a:r>
               <a:rPr lang="en-US" sz="1000" dirty="0">
                 <a:solidFill>
-                  <a:srgbClr val="3A7D8C"/>
-                </a:solidFill>
-                <a:latin typeface="Noto Sans SC" pitchFamily="34" charset="0"/>
-                <a:ea typeface="Noto Sans SC" pitchFamily="34" charset="-122"/>
-                <a:cs typeface="Noto Sans SC" pitchFamily="34" charset="-120"/>
-              </a:rPr>
-              <a:t>suí </a:t>
-            </a:r>
-            <a:pPr algn="ctr" indent="0" marL="0">
-              <a:spcBef>
-                <a:spcPts val="400"/>
-              </a:spcBef>
-              <a:buNone/>
-            </a:pPr>
-            <a:r>
-              <a:rPr lang="en-US" sz="1000" dirty="0">
-                <a:solidFill>
                   <a:srgbClr val="8B94A3"/>
                 </a:solidFill>
                 <a:latin typeface="Noto Sans SC" pitchFamily="34" charset="0"/>
@@ -5390,579 +5849,6 @@
               </a:rPr>
               <a:t>/</a:t>
             </a:r>
-            <a:pPr algn="ctr" indent="0" marL="0">
-              <a:spcBef>
-                <a:spcPts val="400"/>
-              </a:spcBef>
-              <a:buNone/>
-            </a:pPr>
-            <a:r>
-              <a:rPr lang="en-US" sz="1000" dirty="0">
-                <a:solidFill>
-                  <a:srgbClr val="3A7D8C"/>
-                </a:solidFill>
-                <a:latin typeface="Noto Sans SC" pitchFamily="34" charset="0"/>
-                <a:ea typeface="Noto Sans SC" pitchFamily="34" charset="-122"/>
-                <a:cs typeface="Noto Sans SC" pitchFamily="34" charset="-120"/>
-              </a:rPr>
-              <a:t> shuí</a:t>
-            </a:r>
-            <a:endParaRPr lang="en-US" sz="1000" dirty="0"/>
-          </a:p>
-        </p:txBody>
-      </p:sp>
-      <p:sp>
-        <p:nvSpPr>
-          <p:cNvPr id="37" name="Text 35"/>
-          <p:cNvSpPr/>
-          <p:nvPr/>
-        </p:nvSpPr>
-        <p:spPr>
-          <a:xfrm>
-            <a:off x="6159401" y="2847677"/>
-            <a:ext cx="1714649" cy="1031677"/>
-          </a:xfrm>
-          <a:prstGeom prst="roundRect">
-            <a:avLst>
-              <a:gd name="adj" fmla="val 9848"/>
-            </a:avLst>
-          </a:prstGeom>
-          <a:solidFill>
-            <a:srgbClr val="F6F2E8"/>
-          </a:solidFill>
-          <a:ln/>
-        </p:spPr>
-        <p:txBody>
-          <a:bodyPr wrap="square" rtlCol="0" anchor="ctr"/>
-          <a:lstStyle/>
-          <a:p>
-            <a:pPr indent="0" marL="0">
-              <a:buNone/>
-            </a:pPr>
-            <a:endParaRPr lang="en-US" dirty="0"/>
-          </a:p>
-        </p:txBody>
-      </p:sp>
-      <p:sp>
-        <p:nvSpPr>
-          <p:cNvPr id="38" name="Text 36"/>
-          <p:cNvSpPr/>
-          <p:nvPr/>
-        </p:nvSpPr>
-        <p:spPr>
-          <a:xfrm>
-            <a:off x="6194020" y="2974628"/>
-            <a:ext cx="1645411" cy="142875"/>
-          </a:xfrm>
-          <a:prstGeom prst="rect">
-            <a:avLst/>
-          </a:prstGeom>
-          <a:noFill/>
-          <a:ln/>
-        </p:spPr>
-        <p:txBody>
-          <a:bodyPr wrap="square" lIns="0" tIns="0" rIns="0" bIns="0" rtlCol="0" anchor="t"/>
-          <a:lstStyle/>
-          <a:p>
-            <a:pPr algn="ctr" indent="0" marL="0">
-              <a:spcAft>
-                <a:spcPts val="400"/>
-              </a:spcAft>
-              <a:buNone/>
-            </a:pPr>
-            <a:r>
-              <a:rPr lang="en-US" sz="800" b="1" dirty="0">
-                <a:solidFill>
-                  <a:srgbClr val="3A7D8C"/>
-                </a:solidFill>
-                <a:latin typeface="Noto Sans SC" pitchFamily="34" charset="0"/>
-                <a:ea typeface="Noto Sans SC" pitchFamily="34" charset="-122"/>
-                <a:cs typeface="Noto Sans SC" pitchFamily="34" charset="-120"/>
-              </a:rPr>
-              <a:t>ROUND 4</a:t>
-            </a:r>
-            <a:endParaRPr lang="en-US" sz="800" dirty="0"/>
-          </a:p>
-        </p:txBody>
-      </p:sp>
-      <p:sp>
-        <p:nvSpPr>
-          <p:cNvPr id="39" name="Text 37"/>
-          <p:cNvSpPr/>
-          <p:nvPr/>
-        </p:nvSpPr>
-        <p:spPr>
-          <a:xfrm>
-            <a:off x="6194020" y="3168253"/>
-            <a:ext cx="1645411" cy="352425"/>
-          </a:xfrm>
-          <a:prstGeom prst="rect">
-            <a:avLst/>
-          </a:prstGeom>
-          <a:noFill/>
-          <a:ln/>
-        </p:spPr>
-        <p:txBody>
-          <a:bodyPr wrap="square" lIns="0" tIns="0" rIns="0" bIns="0" rtlCol="0" anchor="t"/>
-          <a:lstStyle/>
-          <a:p>
-            <a:pPr algn="ctr" indent="0" marL="0">
-              <a:buNone/>
-            </a:pPr>
-            <a:r>
-              <a:rPr lang="en-US" sz="2000" b="1" dirty="0">
-                <a:solidFill>
-                  <a:srgbClr val="1E2A38"/>
-                </a:solidFill>
-                <a:latin typeface="Noto Serif SC" pitchFamily="34" charset="0"/>
-                <a:ea typeface="Noto Serif SC" pitchFamily="34" charset="-122"/>
-                <a:cs typeface="Noto Serif SC" pitchFamily="34" charset="-120"/>
-              </a:rPr>
-              <a:t>点</a:t>
-            </a:r>
-            <a:endParaRPr lang="en-US" sz="2000" dirty="0"/>
-          </a:p>
-        </p:txBody>
-      </p:sp>
-      <p:sp>
-        <p:nvSpPr>
-          <p:cNvPr id="40" name="Text 38"/>
-          <p:cNvSpPr/>
-          <p:nvPr/>
-        </p:nvSpPr>
-        <p:spPr>
-          <a:xfrm>
-            <a:off x="6194020" y="3571429"/>
-            <a:ext cx="1645411" cy="180975"/>
-          </a:xfrm>
-          <a:prstGeom prst="rect">
-            <a:avLst/>
-          </a:prstGeom>
-          <a:noFill/>
-          <a:ln/>
-        </p:spPr>
-        <p:txBody>
-          <a:bodyPr wrap="square" lIns="0" tIns="0" rIns="0" bIns="0" rtlCol="0" anchor="t"/>
-          <a:lstStyle/>
-          <a:p>
-            <a:pPr algn="ctr" indent="0" marL="0">
-              <a:spcBef>
-                <a:spcPts val="400"/>
-              </a:spcBef>
-              <a:buNone/>
-            </a:pPr>
-            <a:r>
-              <a:rPr lang="en-US" sz="1000" dirty="0">
-                <a:solidFill>
-                  <a:srgbClr val="3A7D8C"/>
-                </a:solidFill>
-                <a:latin typeface="Noto Sans SC" pitchFamily="34" charset="0"/>
-                <a:ea typeface="Noto Sans SC" pitchFamily="34" charset="-122"/>
-                <a:cs typeface="Noto Sans SC" pitchFamily="34" charset="-120"/>
-              </a:rPr>
-              <a:t>dǎn </a:t>
-            </a:r>
-            <a:pPr algn="ctr" indent="0" marL="0">
-              <a:spcBef>
-                <a:spcPts val="400"/>
-              </a:spcBef>
-              <a:buNone/>
-            </a:pPr>
-            <a:r>
-              <a:rPr lang="en-US" sz="1000" dirty="0">
-                <a:solidFill>
-                  <a:srgbClr val="8B94A3"/>
-                </a:solidFill>
-                <a:latin typeface="Noto Sans SC" pitchFamily="34" charset="0"/>
-                <a:ea typeface="Noto Sans SC" pitchFamily="34" charset="-122"/>
-                <a:cs typeface="Noto Sans SC" pitchFamily="34" charset="-120"/>
-              </a:rPr>
-              <a:t>/</a:t>
-            </a:r>
-            <a:pPr algn="ctr" indent="0" marL="0">
-              <a:spcBef>
-                <a:spcPts val="400"/>
-              </a:spcBef>
-              <a:buNone/>
-            </a:pPr>
-            <a:r>
-              <a:rPr lang="en-US" sz="1000" dirty="0">
-                <a:solidFill>
-                  <a:srgbClr val="3A7D8C"/>
-                </a:solidFill>
-                <a:latin typeface="Noto Sans SC" pitchFamily="34" charset="0"/>
-                <a:ea typeface="Noto Sans SC" pitchFamily="34" charset="-122"/>
-                <a:cs typeface="Noto Sans SC" pitchFamily="34" charset="-120"/>
-              </a:rPr>
-              <a:t> diǎn</a:t>
-            </a:r>
-            <a:endParaRPr lang="en-US" sz="1000" dirty="0"/>
-          </a:p>
-        </p:txBody>
-      </p:sp>
-      <p:sp>
-        <p:nvSpPr>
-          <p:cNvPr id="41" name="Text 39"/>
-          <p:cNvSpPr/>
-          <p:nvPr/>
-        </p:nvSpPr>
-        <p:spPr>
-          <a:xfrm>
-            <a:off x="8001000" y="2847677"/>
-            <a:ext cx="1714500" cy="1031677"/>
-          </a:xfrm>
-          <a:prstGeom prst="roundRect">
-            <a:avLst>
-              <a:gd name="adj" fmla="val 9848"/>
-            </a:avLst>
-          </a:prstGeom>
-          <a:solidFill>
-            <a:srgbClr val="F6F2E8"/>
-          </a:solidFill>
-          <a:ln/>
-        </p:spPr>
-        <p:txBody>
-          <a:bodyPr wrap="square" rtlCol="0" anchor="ctr"/>
-          <a:lstStyle/>
-          <a:p>
-            <a:pPr indent="0" marL="0">
-              <a:buNone/>
-            </a:pPr>
-            <a:endParaRPr lang="en-US" dirty="0"/>
-          </a:p>
-        </p:txBody>
-      </p:sp>
-      <p:sp>
-        <p:nvSpPr>
-          <p:cNvPr id="42" name="Text 40"/>
-          <p:cNvSpPr/>
-          <p:nvPr/>
-        </p:nvSpPr>
-        <p:spPr>
-          <a:xfrm>
-            <a:off x="8035620" y="2974628"/>
-            <a:ext cx="1645259" cy="142875"/>
-          </a:xfrm>
-          <a:prstGeom prst="rect">
-            <a:avLst/>
-          </a:prstGeom>
-          <a:noFill/>
-          <a:ln/>
-        </p:spPr>
-        <p:txBody>
-          <a:bodyPr wrap="square" lIns="0" tIns="0" rIns="0" bIns="0" rtlCol="0" anchor="t"/>
-          <a:lstStyle/>
-          <a:p>
-            <a:pPr algn="ctr" indent="0" marL="0">
-              <a:spcAft>
-                <a:spcPts val="400"/>
-              </a:spcAft>
-              <a:buNone/>
-            </a:pPr>
-            <a:r>
-              <a:rPr lang="en-US" sz="800" b="1" dirty="0">
-                <a:solidFill>
-                  <a:srgbClr val="3A7D8C"/>
-                </a:solidFill>
-                <a:latin typeface="Noto Sans SC" pitchFamily="34" charset="0"/>
-                <a:ea typeface="Noto Sans SC" pitchFamily="34" charset="-122"/>
-                <a:cs typeface="Noto Sans SC" pitchFamily="34" charset="-120"/>
-              </a:rPr>
-              <a:t>ROUND 5</a:t>
-            </a:r>
-            <a:endParaRPr lang="en-US" sz="800" dirty="0"/>
-          </a:p>
-        </p:txBody>
-      </p:sp>
-      <p:sp>
-        <p:nvSpPr>
-          <p:cNvPr id="43" name="Text 41"/>
-          <p:cNvSpPr/>
-          <p:nvPr/>
-        </p:nvSpPr>
-        <p:spPr>
-          <a:xfrm>
-            <a:off x="8035620" y="3168253"/>
-            <a:ext cx="1645259" cy="352425"/>
-          </a:xfrm>
-          <a:prstGeom prst="rect">
-            <a:avLst/>
-          </a:prstGeom>
-          <a:noFill/>
-          <a:ln/>
-        </p:spPr>
-        <p:txBody>
-          <a:bodyPr wrap="square" lIns="0" tIns="0" rIns="0" bIns="0" rtlCol="0" anchor="t"/>
-          <a:lstStyle/>
-          <a:p>
-            <a:pPr algn="ctr" indent="0" marL="0">
-              <a:buNone/>
-            </a:pPr>
-            <a:r>
-              <a:rPr lang="en-US" sz="2000" b="1" dirty="0">
-                <a:solidFill>
-                  <a:srgbClr val="1E2A38"/>
-                </a:solidFill>
-                <a:latin typeface="Noto Serif SC" pitchFamily="34" charset="0"/>
-                <a:ea typeface="Noto Serif SC" pitchFamily="34" charset="-122"/>
-                <a:cs typeface="Noto Serif SC" pitchFamily="34" charset="-120"/>
-              </a:rPr>
-              <a:t>住</a:t>
-            </a:r>
-            <a:endParaRPr lang="en-US" sz="2000" dirty="0"/>
-          </a:p>
-        </p:txBody>
-      </p:sp>
-      <p:sp>
-        <p:nvSpPr>
-          <p:cNvPr id="44" name="Text 42"/>
-          <p:cNvSpPr/>
-          <p:nvPr/>
-        </p:nvSpPr>
-        <p:spPr>
-          <a:xfrm>
-            <a:off x="8035620" y="3571429"/>
-            <a:ext cx="1645259" cy="180975"/>
-          </a:xfrm>
-          <a:prstGeom prst="rect">
-            <a:avLst/>
-          </a:prstGeom>
-          <a:noFill/>
-          <a:ln/>
-        </p:spPr>
-        <p:txBody>
-          <a:bodyPr wrap="square" lIns="0" tIns="0" rIns="0" bIns="0" rtlCol="0" anchor="t"/>
-          <a:lstStyle/>
-          <a:p>
-            <a:pPr algn="ctr" indent="0" marL="0">
-              <a:spcBef>
-                <a:spcPts val="400"/>
-              </a:spcBef>
-              <a:buNone/>
-            </a:pPr>
-            <a:r>
-              <a:rPr lang="en-US" sz="1000" dirty="0">
-                <a:solidFill>
-                  <a:srgbClr val="3A7D8C"/>
-                </a:solidFill>
-                <a:latin typeface="Noto Sans SC" pitchFamily="34" charset="0"/>
-                <a:ea typeface="Noto Sans SC" pitchFamily="34" charset="-122"/>
-                <a:cs typeface="Noto Sans SC" pitchFamily="34" charset="-120"/>
-              </a:rPr>
-              <a:t>zhù </a:t>
-            </a:r>
-            <a:pPr algn="ctr" indent="0" marL="0">
-              <a:spcBef>
-                <a:spcPts val="400"/>
-              </a:spcBef>
-              <a:buNone/>
-            </a:pPr>
-            <a:r>
-              <a:rPr lang="en-US" sz="1000" dirty="0">
-                <a:solidFill>
-                  <a:srgbClr val="8B94A3"/>
-                </a:solidFill>
-                <a:latin typeface="Noto Sans SC" pitchFamily="34" charset="0"/>
-                <a:ea typeface="Noto Sans SC" pitchFamily="34" charset="-122"/>
-                <a:cs typeface="Noto Sans SC" pitchFamily="34" charset="-120"/>
-              </a:rPr>
-              <a:t>/</a:t>
-            </a:r>
-            <a:pPr algn="ctr" indent="0" marL="0">
-              <a:spcBef>
-                <a:spcPts val="400"/>
-              </a:spcBef>
-              <a:buNone/>
-            </a:pPr>
-            <a:r>
-              <a:rPr lang="en-US" sz="1000" dirty="0">
-                <a:solidFill>
-                  <a:srgbClr val="3A7D8C"/>
-                </a:solidFill>
-                <a:latin typeface="Noto Sans SC" pitchFamily="34" charset="0"/>
-                <a:ea typeface="Noto Sans SC" pitchFamily="34" charset="-122"/>
-                <a:cs typeface="Noto Sans SC" pitchFamily="34" charset="-120"/>
-              </a:rPr>
-              <a:t> jù</a:t>
-            </a:r>
-            <a:endParaRPr lang="en-US" sz="1000" dirty="0"/>
-          </a:p>
-        </p:txBody>
-      </p:sp>
-      <p:sp>
-        <p:nvSpPr>
-          <p:cNvPr id="45" name="Text 43"/>
-          <p:cNvSpPr/>
-          <p:nvPr/>
-        </p:nvSpPr>
-        <p:spPr>
-          <a:xfrm>
-            <a:off x="9842450" y="2847677"/>
-            <a:ext cx="1714649" cy="1031677"/>
-          </a:xfrm>
-          <a:prstGeom prst="roundRect">
-            <a:avLst>
-              <a:gd name="adj" fmla="val 9848"/>
-            </a:avLst>
-          </a:prstGeom>
-          <a:solidFill>
-            <a:srgbClr val="F6F2E8"/>
-          </a:solidFill>
-          <a:ln/>
-        </p:spPr>
-        <p:txBody>
-          <a:bodyPr wrap="square" rtlCol="0" anchor="ctr"/>
-          <a:lstStyle/>
-          <a:p>
-            <a:pPr indent="0" marL="0">
-              <a:buNone/>
-            </a:pPr>
-            <a:endParaRPr lang="en-US" dirty="0"/>
-          </a:p>
-        </p:txBody>
-      </p:sp>
-      <p:sp>
-        <p:nvSpPr>
-          <p:cNvPr id="46" name="Text 44"/>
-          <p:cNvSpPr/>
-          <p:nvPr/>
-        </p:nvSpPr>
-        <p:spPr>
-          <a:xfrm>
-            <a:off x="9877069" y="2974628"/>
-            <a:ext cx="1645411" cy="142875"/>
-          </a:xfrm>
-          <a:prstGeom prst="rect">
-            <a:avLst/>
-          </a:prstGeom>
-          <a:noFill/>
-          <a:ln/>
-        </p:spPr>
-        <p:txBody>
-          <a:bodyPr wrap="square" lIns="0" tIns="0" rIns="0" bIns="0" rtlCol="0" anchor="t"/>
-          <a:lstStyle/>
-          <a:p>
-            <a:pPr algn="ctr" indent="0" marL="0">
-              <a:spcAft>
-                <a:spcPts val="400"/>
-              </a:spcAft>
-              <a:buNone/>
-            </a:pPr>
-            <a:r>
-              <a:rPr lang="en-US" sz="800" b="1" dirty="0">
-                <a:solidFill>
-                  <a:srgbClr val="3A7D8C"/>
-                </a:solidFill>
-                <a:latin typeface="Noto Sans SC" pitchFamily="34" charset="0"/>
-                <a:ea typeface="Noto Sans SC" pitchFamily="34" charset="-122"/>
-                <a:cs typeface="Noto Sans SC" pitchFamily="34" charset="-120"/>
-              </a:rPr>
-              <a:t>ROUND 6</a:t>
-            </a:r>
-            <a:endParaRPr lang="en-US" sz="800" dirty="0"/>
-          </a:p>
-        </p:txBody>
-      </p:sp>
-      <p:sp>
-        <p:nvSpPr>
-          <p:cNvPr id="47" name="Text 45"/>
-          <p:cNvSpPr/>
-          <p:nvPr/>
-        </p:nvSpPr>
-        <p:spPr>
-          <a:xfrm>
-            <a:off x="9877069" y="3168253"/>
-            <a:ext cx="1645411" cy="352425"/>
-          </a:xfrm>
-          <a:prstGeom prst="rect">
-            <a:avLst/>
-          </a:prstGeom>
-          <a:noFill/>
-          <a:ln/>
-        </p:spPr>
-        <p:txBody>
-          <a:bodyPr wrap="square" lIns="0" tIns="0" rIns="0" bIns="0" rtlCol="0" anchor="t"/>
-          <a:lstStyle/>
-          <a:p>
-            <a:pPr algn="ctr" indent="0" marL="0">
-              <a:buNone/>
-            </a:pPr>
-            <a:r>
-              <a:rPr lang="en-US" sz="2000" b="1" dirty="0">
-                <a:solidFill>
-                  <a:srgbClr val="1E2A38"/>
-                </a:solidFill>
-                <a:latin typeface="Noto Serif SC" pitchFamily="34" charset="0"/>
-                <a:ea typeface="Noto Serif SC" pitchFamily="34" charset="-122"/>
-                <a:cs typeface="Noto Serif SC" pitchFamily="34" charset="-120"/>
-              </a:rPr>
-              <a:t>年</a:t>
-            </a:r>
-            <a:endParaRPr lang="en-US" sz="2000" dirty="0"/>
-          </a:p>
-        </p:txBody>
-      </p:sp>
-      <p:sp>
-        <p:nvSpPr>
-          <p:cNvPr id="48" name="Text 46"/>
-          <p:cNvSpPr/>
-          <p:nvPr/>
-        </p:nvSpPr>
-        <p:spPr>
-          <a:xfrm>
-            <a:off x="9877069" y="3571429"/>
-            <a:ext cx="1645411" cy="180975"/>
-          </a:xfrm>
-          <a:prstGeom prst="rect">
-            <a:avLst/>
-          </a:prstGeom>
-          <a:noFill/>
-          <a:ln/>
-        </p:spPr>
-        <p:txBody>
-          <a:bodyPr wrap="square" lIns="0" tIns="0" rIns="0" bIns="0" rtlCol="0" anchor="t"/>
-          <a:lstStyle/>
-          <a:p>
-            <a:pPr algn="ctr" indent="0" marL="0">
-              <a:spcBef>
-                <a:spcPts val="400"/>
-              </a:spcBef>
-              <a:buNone/>
-            </a:pPr>
-            <a:r>
-              <a:rPr lang="en-US" sz="1000" dirty="0">
-                <a:solidFill>
-                  <a:srgbClr val="3A7D8C"/>
-                </a:solidFill>
-                <a:latin typeface="Noto Sans SC" pitchFamily="34" charset="0"/>
-                <a:ea typeface="Noto Sans SC" pitchFamily="34" charset="-122"/>
-                <a:cs typeface="Noto Sans SC" pitchFamily="34" charset="-120"/>
-              </a:rPr>
-              <a:t>nián </a:t>
-            </a:r>
-            <a:pPr algn="ctr" indent="0" marL="0">
-              <a:spcBef>
-                <a:spcPts val="400"/>
-              </a:spcBef>
-              <a:buNone/>
-            </a:pPr>
-            <a:r>
-              <a:rPr lang="en-US" sz="1000" dirty="0">
-                <a:solidFill>
-                  <a:srgbClr val="8B94A3"/>
-                </a:solidFill>
-                <a:latin typeface="Noto Sans SC" pitchFamily="34" charset="0"/>
-                <a:ea typeface="Noto Sans SC" pitchFamily="34" charset="-122"/>
-                <a:cs typeface="Noto Sans SC" pitchFamily="34" charset="-120"/>
-              </a:rPr>
-              <a:t>/</a:t>
-            </a:r>
-            <a:pPr algn="ctr" indent="0" marL="0">
-              <a:spcBef>
-                <a:spcPts val="400"/>
-              </a:spcBef>
-              <a:buNone/>
-            </a:pPr>
             <a:r>
               <a:rPr lang="en-US" sz="1000" dirty="0">
                 <a:solidFill>
@@ -6792,9 +6678,6 @@
               </a:rPr>
               <a:t>On whiteboards: write the </a:t>
             </a:r>
-            <a:pPr algn="l" indent="0" marL="0">
-              <a:buNone/>
-            </a:pPr>
             <a:r>
               <a:rPr lang="en-US" sz="1200" b="1" dirty="0">
                 <a:solidFill>
@@ -6806,9 +6689,6 @@
               </a:rPr>
               <a:t>上/下 pair</a:t>
             </a:r>
-            <a:pPr algn="l" indent="0" marL="0">
-              <a:buNone/>
-            </a:pPr>
             <a:r>
               <a:rPr lang="en-US" sz="1200" dirty="0">
                 <a:solidFill>
@@ -6937,9 +6817,6 @@
               </a:rPr>
               <a:t>Correct this sentence: </a:t>
             </a:r>
-            <a:pPr algn="l" indent="0" marL="0">
-              <a:buNone/>
-            </a:pPr>
             <a:r>
               <a:rPr lang="en-US" sz="1400" b="1" dirty="0">
                 <a:solidFill>
@@ -7107,9 +6984,6 @@
               </a:rPr>
               <a:t>👀 Next lesson: </a:t>
             </a:r>
-            <a:pPr algn="l" indent="0" marL="0">
-              <a:buNone/>
-            </a:pPr>
             <a:r>
               <a:rPr lang="en-US" sz="900" b="1" dirty="0">
                 <a:solidFill>
@@ -7550,18 +7424,6 @@
               </a:rPr>
               <a:t>Today: </a:t>
             </a:r>
-            <a:pPr algn="ctr" indent="0" marL="0">
-              <a:lnSpc>
-                <a:spcPts val="1950"/>
-              </a:lnSpc>
-              <a:spcBef>
-                <a:spcPts val="1400"/>
-              </a:spcBef>
-              <a:spcAft>
-                <a:spcPts val="1300"/>
-              </a:spcAft>
-              <a:buNone/>
-            </a:pPr>
             <a:r>
               <a:rPr lang="en-US" sz="1300" b="1" dirty="0">
                 <a:solidFill>
@@ -7573,18 +7435,6 @@
               </a:rPr>
               <a:t>上/下 phrase pairs</a:t>
             </a:r>
-            <a:pPr algn="ctr" indent="0" marL="0">
-              <a:lnSpc>
-                <a:spcPts val="1950"/>
-              </a:lnSpc>
-              <a:spcBef>
-                <a:spcPts val="1400"/>
-              </a:spcBef>
-              <a:spcAft>
-                <a:spcPts val="1300"/>
-              </a:spcAft>
-              <a:buNone/>
-            </a:pPr>
             <a:r>
               <a:rPr lang="en-US" sz="1300" dirty="0">
                 <a:solidFill>
@@ -7596,18 +7446,6 @@
               </a:rPr>
               <a:t> &amp; </a:t>
             </a:r>
-            <a:pPr algn="ctr" indent="0" marL="0">
-              <a:lnSpc>
-                <a:spcPts val="1950"/>
-              </a:lnSpc>
-              <a:spcBef>
-                <a:spcPts val="1400"/>
-              </a:spcBef>
-              <a:spcAft>
-                <a:spcPts val="1300"/>
-              </a:spcAft>
-              <a:buNone/>
-            </a:pPr>
             <a:r>
               <a:rPr lang="en-US" sz="1300" b="1" dirty="0">
                 <a:solidFill>
@@ -7619,18 +7457,6 @@
               </a:rPr>
               <a:t>pinyin discrimination</a:t>
             </a:r>
-            <a:pPr algn="ctr" indent="0" marL="0">
-              <a:lnSpc>
-                <a:spcPts val="1950"/>
-              </a:lnSpc>
-              <a:spcBef>
-                <a:spcPts val="1400"/>
-              </a:spcBef>
-              <a:spcAft>
-                <a:spcPts val="1300"/>
-              </a:spcAft>
-              <a:buNone/>
-            </a:pPr>
             <a:endParaRPr lang="en-US" sz="1300" dirty="0"/>
           </a:p>
           <a:p>
@@ -9685,12 +9511,6 @@
               </a:rPr>
               <a:t>We are learning to use the </a:t>
             </a:r>
-            <a:pPr algn="l" indent="0" marL="0">
-              <a:lnSpc>
-                <a:spcPts val="2250"/>
-              </a:lnSpc>
-              <a:buNone/>
-            </a:pPr>
             <a:r>
               <a:rPr lang="en-US" sz="1500" b="1" dirty="0">
                 <a:solidFill>
@@ -9702,12 +9522,6 @@
               </a:rPr>
               <a:t>上/下 phrase pairs</a:t>
             </a:r>
-            <a:pPr algn="l" indent="0" marL="0">
-              <a:lnSpc>
-                <a:spcPts val="2250"/>
-              </a:lnSpc>
-              <a:buNone/>
-            </a:pPr>
             <a:r>
               <a:rPr lang="en-US" sz="1500" dirty="0">
                 <a:solidFill>
@@ -9719,12 +9533,6 @@
               </a:rPr>
               <a:t> correctly and read </a:t>
             </a:r>
-            <a:pPr algn="l" indent="0" marL="0">
-              <a:lnSpc>
-                <a:spcPts val="2250"/>
-              </a:lnSpc>
-              <a:buNone/>
-            </a:pPr>
             <a:r>
               <a:rPr lang="en-US" sz="1500" b="1" dirty="0">
                 <a:solidFill>
@@ -9736,12 +9544,6 @@
               </a:rPr>
               <a:t>pinyin</a:t>
             </a:r>
-            <a:pPr algn="l" indent="0" marL="0">
-              <a:lnSpc>
-                <a:spcPts val="2250"/>
-              </a:lnSpc>
-              <a:buNone/>
-            </a:pPr>
             <a:r>
               <a:rPr lang="en-US" sz="1500" dirty="0">
                 <a:solidFill>
@@ -9865,9 +9667,6 @@
               </a:rPr>
               <a:t>I can match </a:t>
             </a:r>
-            <a:pPr algn="l" indent="0" marL="0">
-              <a:buNone/>
-            </a:pPr>
             <a:r>
               <a:rPr lang="en-US" sz="1300" b="1" dirty="0">
                 <a:solidFill>
@@ -9879,9 +9678,6 @@
               </a:rPr>
               <a:t>上/下 phrase pairs</a:t>
             </a:r>
-            <a:pPr algn="l" indent="0" marL="0">
-              <a:buNone/>
-            </a:pPr>
             <a:r>
               <a:rPr lang="en-US" sz="1300" dirty="0">
                 <a:solidFill>
@@ -10044,9 +9840,6 @@
               </a:rPr>
               <a:t>I can explain the difference between </a:t>
             </a:r>
-            <a:pPr algn="l" indent="0" marL="0">
-              <a:buNone/>
-            </a:pPr>
             <a:r>
               <a:rPr lang="en-US" sz="1300" b="1" dirty="0">
                 <a:solidFill>
@@ -10058,9 +9851,6 @@
               </a:rPr>
               <a:t>上车</a:t>
             </a:r>
-            <a:pPr algn="l" indent="0" marL="0">
-              <a:buNone/>
-            </a:pPr>
             <a:r>
               <a:rPr lang="en-US" sz="1300" dirty="0">
                 <a:solidFill>
@@ -10072,9 +9862,6 @@
               </a:rPr>
               <a:t> and </a:t>
             </a:r>
-            <a:pPr algn="l" indent="0" marL="0">
-              <a:buNone/>
-            </a:pPr>
             <a:r>
               <a:rPr lang="en-US" sz="1300" b="1" dirty="0">
                 <a:solidFill>
@@ -10086,9 +9873,6 @@
               </a:rPr>
               <a:t>下车</a:t>
             </a:r>
-            <a:pPr algn="l" indent="0" marL="0">
-              <a:buNone/>
-            </a:pPr>
             <a:r>
               <a:rPr lang="en-US" sz="1300" dirty="0">
                 <a:solidFill>
@@ -10251,9 +10035,6 @@
               </a:rPr>
               <a:t>I can circle the correct </a:t>
             </a:r>
-            <a:pPr algn="l" indent="0" marL="0">
-              <a:buNone/>
-            </a:pPr>
             <a:r>
               <a:rPr lang="en-US" sz="1300" b="1" dirty="0">
                 <a:solidFill>
@@ -10265,9 +10046,6 @@
               </a:rPr>
               <a:t>pinyin</a:t>
             </a:r>
-            <a:pPr algn="l" indent="0" marL="0">
-              <a:buNone/>
-            </a:pPr>
             <a:r>
               <a:rPr lang="en-US" sz="1300" dirty="0">
                 <a:solidFill>
@@ -11414,9 +11192,6 @@
               </a:rPr>
               <a:t>classes are over </a:t>
             </a:r>
-            <a:pPr algn="l" indent="0" marL="0">
-              <a:buNone/>
-            </a:pPr>
             <a:r>
               <a:rPr lang="en-US" sz="900" b="1" dirty="0">
                 <a:solidFill>
@@ -12129,12 +11904,6 @@
               <a:t>⚠️ Word order: 坐 + vehicle + activity — NOT activity + 坐 + vehicle
 </a:t>
             </a:r>
-            <a:pPr algn="l" indent="0" marL="0">
-              <a:lnSpc>
-                <a:spcPts val="1560"/>
-              </a:lnSpc>
-              <a:buNone/>
-            </a:pPr>
             <a:r>
               <a:rPr lang="en-US" sz="900" dirty="0">
                 <a:solidFill>
@@ -12262,12 +12031,6 @@
               </a:rPr>
               <a:t>上学/放学 doesn't use 下 — it uses </a:t>
             </a:r>
-            <a:pPr algn="l" indent="0" marL="0">
-              <a:lnSpc>
-                <a:spcPts val="1400"/>
-              </a:lnSpc>
-              <a:buNone/>
-            </a:pPr>
             <a:r>
               <a:rPr lang="en-US" sz="1000" b="1" dirty="0">
                 <a:solidFill>
@@ -12279,12 +12042,6 @@
               </a:rPr>
               <a:t>放</a:t>
             </a:r>
-            <a:pPr algn="l" indent="0" marL="0">
-              <a:lnSpc>
-                <a:spcPts val="1400"/>
-              </a:lnSpc>
-              <a:buNone/>
-            </a:pPr>
             <a:r>
               <a:rPr lang="en-US" sz="1000" dirty="0">
                 <a:solidFill>
@@ -12781,9 +12538,6 @@
               </a:rPr>
               <a:t>zuò </a:t>
             </a:r>
-            <a:pPr algn="ctr" indent="0" marL="0">
-              <a:buNone/>
-            </a:pPr>
             <a:r>
               <a:rPr lang="en-US" sz="1300" dirty="0">
                 <a:solidFill>
@@ -12795,9 +12549,6 @@
               </a:rPr>
               <a:t>/</a:t>
             </a:r>
-            <a:pPr algn="ctr" indent="0" marL="0">
-              <a:buNone/>
-            </a:pPr>
             <a:r>
               <a:rPr lang="en-US" sz="1300" dirty="0">
                 <a:solidFill>
@@ -12922,9 +12673,6 @@
               </a:rPr>
               <a:t>fēn </a:t>
             </a:r>
-            <a:pPr algn="ctr" indent="0" marL="0">
-              <a:buNone/>
-            </a:pPr>
             <a:r>
               <a:rPr lang="en-US" sz="1300" dirty="0">
                 <a:solidFill>
@@ -12936,9 +12684,6 @@
               </a:rPr>
               <a:t>/</a:t>
             </a:r>
-            <a:pPr algn="ctr" indent="0" marL="0">
-              <a:buNone/>
-            </a:pPr>
             <a:r>
               <a:rPr lang="en-US" sz="1300" dirty="0">
                 <a:solidFill>
@@ -13063,9 +12808,6 @@
               </a:rPr>
               <a:t>suí </a:t>
             </a:r>
-            <a:pPr algn="ctr" indent="0" marL="0">
-              <a:buNone/>
-            </a:pPr>
             <a:r>
               <a:rPr lang="en-US" sz="1300" dirty="0">
                 <a:solidFill>
@@ -13077,9 +12819,6 @@
               </a:rPr>
               <a:t>/</a:t>
             </a:r>
-            <a:pPr algn="ctr" indent="0" marL="0">
-              <a:buNone/>
-            </a:pPr>
             <a:r>
               <a:rPr lang="en-US" sz="1300" dirty="0">
                 <a:solidFill>
@@ -13204,9 +12943,6 @@
               </a:rPr>
               <a:t>dǎn </a:t>
             </a:r>
-            <a:pPr algn="ctr" indent="0" marL="0">
-              <a:buNone/>
-            </a:pPr>
             <a:r>
               <a:rPr lang="en-US" sz="1300" dirty="0">
                 <a:solidFill>
@@ -13218,9 +12954,6 @@
               </a:rPr>
               <a:t>/</a:t>
             </a:r>
-            <a:pPr algn="ctr" indent="0" marL="0">
-              <a:buNone/>
-            </a:pPr>
             <a:r>
               <a:rPr lang="en-US" sz="1300" dirty="0">
                 <a:solidFill>
@@ -13345,9 +13078,6 @@
               </a:rPr>
               <a:t>zhù </a:t>
             </a:r>
-            <a:pPr algn="ctr" indent="0" marL="0">
-              <a:buNone/>
-            </a:pPr>
             <a:r>
               <a:rPr lang="en-US" sz="1300" dirty="0">
                 <a:solidFill>
@@ -13359,9 +13089,6 @@
               </a:rPr>
               <a:t>/</a:t>
             </a:r>
-            <a:pPr algn="ctr" indent="0" marL="0">
-              <a:buNone/>
-            </a:pPr>
             <a:r>
               <a:rPr lang="en-US" sz="1300" dirty="0">
                 <a:solidFill>
@@ -13486,9 +13213,6 @@
               </a:rPr>
               <a:t>nián </a:t>
             </a:r>
-            <a:pPr algn="ctr" indent="0" marL="0">
-              <a:buNone/>
-            </a:pPr>
             <a:r>
               <a:rPr lang="en-US" sz="1300" dirty="0">
                 <a:solidFill>
@@ -13500,9 +13224,6 @@
               </a:rPr>
               <a:t>/</a:t>
             </a:r>
-            <a:pPr algn="ctr" indent="0" marL="0">
-              <a:buNone/>
-            </a:pPr>
             <a:r>
               <a:rPr lang="en-US" sz="1300" dirty="0">
                 <a:solidFill>
@@ -13592,9 +13313,6 @@
               <a:t>🔊 Model 2 examples on the projector
 </a:t>
             </a:r>
-            <a:pPr algn="l" indent="0" marL="0">
-              <a:buNone/>
-            </a:pPr>
             <a:r>
               <a:rPr lang="en-US" sz="1000" dirty="0">
                 <a:solidFill>
@@ -14049,9 +13767,6 @@
               </a:rPr>
               <a:t>Error correction: </a:t>
             </a:r>
-            <a:pPr algn="l" indent="0" marL="0">
-              <a:buNone/>
-            </a:pPr>
             <a:r>
               <a:rPr lang="en-US" sz="1400" b="1" dirty="0">
                 <a:solidFill>
@@ -14063,9 +13778,6 @@
               </a:rPr>
               <a:t>「我上学坐校车。」</a:t>
             </a:r>
-            <a:pPr algn="l" indent="0" marL="0">
-              <a:buNone/>
-            </a:pPr>
             <a:r>
               <a:rPr lang="en-US" sz="1400" dirty="0">
                 <a:solidFill>
@@ -14229,9 +13941,6 @@
               </a:rPr>
               <a:t>What's the odd one out: </a:t>
             </a:r>
-            <a:pPr algn="l" indent="0" marL="0">
-              <a:buNone/>
-            </a:pPr>
             <a:r>
               <a:rPr lang="en-US" sz="1400" b="1" dirty="0">
                 <a:solidFill>
@@ -14243,9 +13952,6 @@
               </a:rPr>
               <a:t>上班/下班</a:t>
             </a:r>
-            <a:pPr algn="l" indent="0" marL="0">
-              <a:buNone/>
-            </a:pPr>
             <a:r>
               <a:rPr lang="en-US" sz="1400" dirty="0">
                 <a:solidFill>
@@ -14257,9 +13963,6 @@
               </a:rPr>
               <a:t>, </a:t>
             </a:r>
-            <a:pPr algn="l" indent="0" marL="0">
-              <a:buNone/>
-            </a:pPr>
             <a:r>
               <a:rPr lang="en-US" sz="1400" b="1" dirty="0">
                 <a:solidFill>
@@ -14271,9 +13974,6 @@
               </a:rPr>
               <a:t>上车/下车</a:t>
             </a:r>
-            <a:pPr algn="l" indent="0" marL="0">
-              <a:buNone/>
-            </a:pPr>
             <a:r>
               <a:rPr lang="en-US" sz="1400" dirty="0">
                 <a:solidFill>
@@ -14285,9 +13985,6 @@
               </a:rPr>
               <a:t>, </a:t>
             </a:r>
-            <a:pPr algn="l" indent="0" marL="0">
-              <a:buNone/>
-            </a:pPr>
             <a:r>
               <a:rPr lang="en-US" sz="1400" b="1" dirty="0">
                 <a:solidFill>
@@ -14299,9 +13996,6 @@
               </a:rPr>
               <a:t>上学/放学</a:t>
             </a:r>
-            <a:pPr algn="l" indent="0" marL="0">
-              <a:buNone/>
-            </a:pPr>
             <a:r>
               <a:rPr lang="en-US" sz="1400" dirty="0">
                 <a:solidFill>
@@ -15059,9 +14753,6 @@
               </a:rPr>
               <a:t>Error correction: </a:t>
             </a:r>
-            <a:pPr algn="l" indent="0" marL="0">
-              <a:buNone/>
-            </a:pPr>
             <a:r>
               <a:rPr lang="en-US" sz="1300" b="1" dirty="0">
                 <a:solidFill>
@@ -15116,12 +14807,6 @@
               <a:t>我坐校车上学 ✓
 </a:t>
             </a:r>
-            <a:pPr algn="r" indent="0" marL="0">
-              <a:lnSpc>
-                <a:spcPts val="1960"/>
-              </a:lnSpc>
-              <a:buNone/>
-            </a:pPr>
             <a:r>
               <a:rPr lang="en-US" sz="900" dirty="0">
                 <a:solidFill>
@@ -15251,12 +14936,6 @@
               <a:t>上学/放学
 </a:t>
             </a:r>
-            <a:pPr algn="r" indent="0" marL="0">
-              <a:lnSpc>
-                <a:spcPts val="1960"/>
-              </a:lnSpc>
-              <a:buNone/>
-            </a:pPr>
             <a:r>
               <a:rPr lang="en-US" sz="900" dirty="0">
                 <a:solidFill>
